--- a/AI_for_Operations_Course/Slides/Class_05_Route_Optimization_Fleet_Management.pptx
+++ b/AI_for_Operations_Course/Slides/Class_05_Route_Optimization_Fleet_Management.pptx
@@ -2549,6 +2549,10 @@
           </a:solidFill>
           <a:ln/>
         </p:spPr>
+        <p:txBody>
+          <a:bodyPr/>
+          <a:p/>
+        </p:txBody>
       </p:sp>
       <p:sp>
         <p:nvSpPr>
@@ -3090,6 +3094,10 @@
           </a:solidFill>
           <a:ln/>
         </p:spPr>
+        <p:txBody>
+          <a:bodyPr/>
+          <a:p/>
+        </p:txBody>
       </p:sp>
       <p:sp>
         <p:nvSpPr>
@@ -3671,6 +3679,10 @@
           </a:solidFill>
           <a:ln/>
         </p:spPr>
+        <p:txBody>
+          <a:bodyPr/>
+          <a:p/>
+        </p:txBody>
       </p:sp>
       <p:sp>
         <p:nvSpPr>
@@ -4252,6 +4264,10 @@
           </a:solidFill>
           <a:ln/>
         </p:spPr>
+        <p:txBody>
+          <a:bodyPr/>
+          <a:p/>
+        </p:txBody>
       </p:sp>
       <p:sp>
         <p:nvSpPr>
@@ -4804,6 +4820,10 @@
           </a:solidFill>
           <a:ln/>
         </p:spPr>
+        <p:txBody>
+          <a:bodyPr/>
+          <a:p/>
+        </p:txBody>
       </p:sp>
       <p:sp>
         <p:nvSpPr>
@@ -5276,6 +5296,10 @@
           </a:solidFill>
           <a:ln/>
         </p:spPr>
+        <p:txBody>
+          <a:bodyPr/>
+          <a:p/>
+        </p:txBody>
       </p:sp>
       <p:sp>
         <p:nvSpPr>
@@ -5828,6 +5852,10 @@
           </a:solidFill>
           <a:ln/>
         </p:spPr>
+        <p:txBody>
+          <a:bodyPr/>
+          <a:p/>
+        </p:txBody>
       </p:sp>
       <p:sp>
         <p:nvSpPr>
@@ -6191,6 +6219,10 @@
           </a:solidFill>
           <a:ln/>
         </p:spPr>
+        <p:txBody>
+          <a:bodyPr/>
+          <a:p/>
+        </p:txBody>
       </p:sp>
       <p:sp>
         <p:nvSpPr>
@@ -6683,7 +6715,7 @@
                 <a:ea typeface="Calibri" pitchFamily="34" charset="-122"/>
                 <a:cs typeface="Calibri" pitchFamily="34" charset="-120"/>
               </a:rPr>
-              <a:t>www.proxiant.com</a:t>
+              <a:t>proxiant.ai</a:t>
             </a:r>
             <a:endParaRPr lang="en-US" sz="1800" dirty="0"/>
           </a:p>
@@ -6772,6 +6804,10 @@
           </a:solidFill>
           <a:ln/>
         </p:spPr>
+        <p:txBody>
+          <a:bodyPr/>
+          <a:p/>
+        </p:txBody>
       </p:sp>
       <p:sp>
         <p:nvSpPr>
@@ -7175,6 +7211,10 @@
           </a:solidFill>
           <a:ln/>
         </p:spPr>
+        <p:txBody>
+          <a:bodyPr/>
+          <a:p/>
+        </p:txBody>
       </p:sp>
       <p:sp>
         <p:nvSpPr>
@@ -7618,6 +7658,10 @@
           </a:solidFill>
           <a:ln/>
         </p:spPr>
+        <p:txBody>
+          <a:bodyPr/>
+          <a:p/>
+        </p:txBody>
       </p:sp>
       <p:sp>
         <p:nvSpPr>
@@ -8159,6 +8203,10 @@
           </a:solidFill>
           <a:ln/>
         </p:spPr>
+        <p:txBody>
+          <a:bodyPr/>
+          <a:p/>
+        </p:txBody>
       </p:sp>
       <p:sp>
         <p:nvSpPr>
@@ -8602,6 +8650,10 @@
           </a:solidFill>
           <a:ln/>
         </p:spPr>
+        <p:txBody>
+          <a:bodyPr/>
+          <a:p/>
+        </p:txBody>
       </p:sp>
       <p:sp>
         <p:nvSpPr>
@@ -9172,6 +9224,10 @@
           </a:solidFill>
           <a:ln/>
         </p:spPr>
+        <p:txBody>
+          <a:bodyPr/>
+          <a:p/>
+        </p:txBody>
       </p:sp>
       <p:sp>
         <p:nvSpPr>
@@ -9724,6 +9780,10 @@
           </a:solidFill>
           <a:ln/>
         </p:spPr>
+        <p:txBody>
+          <a:bodyPr/>
+          <a:p/>
+        </p:txBody>
       </p:sp>
       <p:sp>
         <p:nvSpPr>
@@ -10294,6 +10354,10 @@
           </a:solidFill>
           <a:ln/>
         </p:spPr>
+        <p:txBody>
+          <a:bodyPr/>
+          <a:p/>
+        </p:txBody>
       </p:sp>
       <p:sp>
         <p:nvSpPr>
